--- a/livro_ia_educacao/saida/pptx/Cap30_slides.pptx
+++ b/livro_ia_educacao/saida/pptx/Cap30_slides.pptx
@@ -10099,11 +10099,11 @@
         <p:spPr>
           <a:xfrm>
             <a:off x="548640" y="1417320"/>
-            <a:ext cx="11064240" cy="762000"/>
+            <a:ext cx="11064240" cy="682752"/>
           </a:xfrm>
           <a:prstGeom prst="roundRect">
             <a:avLst>
-              <a:gd name="adj" fmla="val 14400"/>
+              <a:gd name="adj" fmla="val 16071"/>
             </a:avLst>
           </a:prstGeom>
           <a:solidFill>
@@ -10130,7 +10130,7 @@
         <p:spPr>
           <a:xfrm>
             <a:off x="731520" y="1417320"/>
-            <a:ext cx="548640" cy="762000"/>
+            <a:ext cx="548640" cy="682752"/>
           </a:xfrm>
           <a:prstGeom prst="rect">
             <a:avLst/>
@@ -10166,7 +10166,7 @@
         <p:spPr>
           <a:xfrm>
             <a:off x="1463040" y="1417320"/>
-            <a:ext cx="9966960" cy="762000"/>
+            <a:ext cx="9966960" cy="682752"/>
           </a:xfrm>
           <a:prstGeom prst="rect">
             <a:avLst/>
@@ -10201,12 +10201,12 @@
         </p:nvSpPr>
         <p:spPr>
           <a:xfrm>
-            <a:off x="548640" y="2289048"/>
-            <a:ext cx="11064240" cy="762000"/>
+            <a:off x="548640" y="2209800"/>
+            <a:ext cx="11064240" cy="682752"/>
           </a:xfrm>
           <a:prstGeom prst="roundRect">
             <a:avLst>
-              <a:gd name="adj" fmla="val 14400"/>
+              <a:gd name="adj" fmla="val 16071"/>
             </a:avLst>
           </a:prstGeom>
           <a:solidFill>
@@ -10232,8 +10232,8 @@
         </p:nvSpPr>
         <p:spPr>
           <a:xfrm>
-            <a:off x="731520" y="2289048"/>
-            <a:ext cx="548640" cy="762000"/>
+            <a:off x="731520" y="2209800"/>
+            <a:ext cx="548640" cy="682752"/>
           </a:xfrm>
           <a:prstGeom prst="rect">
             <a:avLst/>
@@ -10268,8 +10268,8 @@
         </p:nvSpPr>
         <p:spPr>
           <a:xfrm>
-            <a:off x="1463040" y="2289048"/>
-            <a:ext cx="9966960" cy="762000"/>
+            <a:off x="1463040" y="2209800"/>
+            <a:ext cx="9966960" cy="682752"/>
           </a:xfrm>
           <a:prstGeom prst="rect">
             <a:avLst/>
@@ -10304,12 +10304,12 @@
         </p:nvSpPr>
         <p:spPr>
           <a:xfrm>
-            <a:off x="548640" y="3160776"/>
-            <a:ext cx="11064240" cy="762000"/>
+            <a:off x="548640" y="3002280"/>
+            <a:ext cx="11064240" cy="682752"/>
           </a:xfrm>
           <a:prstGeom prst="roundRect">
             <a:avLst>
-              <a:gd name="adj" fmla="val 14400"/>
+              <a:gd name="adj" fmla="val 16071"/>
             </a:avLst>
           </a:prstGeom>
           <a:solidFill>
@@ -10335,8 +10335,8 @@
         </p:nvSpPr>
         <p:spPr>
           <a:xfrm>
-            <a:off x="731520" y="3160776"/>
-            <a:ext cx="548640" cy="762000"/>
+            <a:off x="731520" y="3002280"/>
+            <a:ext cx="548640" cy="682752"/>
           </a:xfrm>
           <a:prstGeom prst="rect">
             <a:avLst/>
@@ -10371,8 +10371,8 @@
         </p:nvSpPr>
         <p:spPr>
           <a:xfrm>
-            <a:off x="1463040" y="3160776"/>
-            <a:ext cx="9966960" cy="762000"/>
+            <a:off x="1463040" y="3002280"/>
+            <a:ext cx="9966960" cy="682752"/>
           </a:xfrm>
           <a:prstGeom prst="rect">
             <a:avLst/>
@@ -10407,12 +10407,12 @@
         </p:nvSpPr>
         <p:spPr>
           <a:xfrm>
-            <a:off x="548640" y="4032504"/>
-            <a:ext cx="11064240" cy="762000"/>
+            <a:off x="548640" y="3794760"/>
+            <a:ext cx="11064240" cy="682752"/>
           </a:xfrm>
           <a:prstGeom prst="roundRect">
             <a:avLst>
-              <a:gd name="adj" fmla="val 14400"/>
+              <a:gd name="adj" fmla="val 16071"/>
             </a:avLst>
           </a:prstGeom>
           <a:solidFill>
@@ -10438,8 +10438,8 @@
         </p:nvSpPr>
         <p:spPr>
           <a:xfrm>
-            <a:off x="731520" y="4032504"/>
-            <a:ext cx="548640" cy="762000"/>
+            <a:off x="731520" y="3794760"/>
+            <a:ext cx="548640" cy="682752"/>
           </a:xfrm>
           <a:prstGeom prst="rect">
             <a:avLst/>
@@ -10474,8 +10474,8 @@
         </p:nvSpPr>
         <p:spPr>
           <a:xfrm>
-            <a:off x="1463040" y="4032504"/>
-            <a:ext cx="9966960" cy="762000"/>
+            <a:off x="1463040" y="3794760"/>
+            <a:ext cx="9966960" cy="682752"/>
           </a:xfrm>
           <a:prstGeom prst="rect">
             <a:avLst/>
@@ -10510,12 +10510,12 @@
         </p:nvSpPr>
         <p:spPr>
           <a:xfrm>
-            <a:off x="548640" y="4904232"/>
-            <a:ext cx="11064240" cy="762000"/>
+            <a:off x="548640" y="4587240"/>
+            <a:ext cx="11064240" cy="682752"/>
           </a:xfrm>
           <a:prstGeom prst="roundRect">
             <a:avLst>
-              <a:gd name="adj" fmla="val 14400"/>
+              <a:gd name="adj" fmla="val 16071"/>
             </a:avLst>
           </a:prstGeom>
           <a:solidFill>
@@ -10541,8 +10541,8 @@
         </p:nvSpPr>
         <p:spPr>
           <a:xfrm>
-            <a:off x="731520" y="4904232"/>
-            <a:ext cx="548640" cy="762000"/>
+            <a:off x="731520" y="4587240"/>
+            <a:ext cx="548640" cy="682752"/>
           </a:xfrm>
           <a:prstGeom prst="rect">
             <a:avLst/>
@@ -10577,8 +10577,8 @@
         </p:nvSpPr>
         <p:spPr>
           <a:xfrm>
-            <a:off x="1463040" y="4904232"/>
-            <a:ext cx="9966960" cy="762000"/>
+            <a:off x="1463040" y="4587240"/>
+            <a:ext cx="9966960" cy="682752"/>
           </a:xfrm>
           <a:prstGeom prst="rect">
             <a:avLst/>
@@ -10613,12 +10613,12 @@
         </p:nvSpPr>
         <p:spPr>
           <a:xfrm>
-            <a:off x="548640" y="5775960"/>
-            <a:ext cx="11064240" cy="762000"/>
+            <a:off x="548640" y="5379720"/>
+            <a:ext cx="11064240" cy="682752"/>
           </a:xfrm>
           <a:prstGeom prst="roundRect">
             <a:avLst>
-              <a:gd name="adj" fmla="val 14400"/>
+              <a:gd name="adj" fmla="val 16071"/>
             </a:avLst>
           </a:prstGeom>
           <a:solidFill>
@@ -10644,8 +10644,8 @@
         </p:nvSpPr>
         <p:spPr>
           <a:xfrm>
-            <a:off x="731520" y="5775960"/>
-            <a:ext cx="548640" cy="762000"/>
+            <a:off x="731520" y="5379720"/>
+            <a:ext cx="548640" cy="682752"/>
           </a:xfrm>
           <a:prstGeom prst="rect">
             <a:avLst/>
@@ -10680,8 +10680,8 @@
         </p:nvSpPr>
         <p:spPr>
           <a:xfrm>
-            <a:off x="1463040" y="5775960"/>
-            <a:ext cx="9966960" cy="762000"/>
+            <a:off x="1463040" y="5379720"/>
+            <a:ext cx="9966960" cy="682752"/>
           </a:xfrm>
           <a:prstGeom prst="rect">
             <a:avLst/>
